--- a/course_materials/weeks/week_03/week_03_schemas_constraints_integrity.pptx
+++ b/course_materials/weeks/week_03/week_03_schemas_constraints_integrity.pptx
@@ -2,32 +2,32 @@
 <file path=ppt/presentation.xml><?xml version="1.0" encoding="utf-8"?>
 <p:presentation xmlns:p="http://schemas.openxmlformats.org/presentationml/2006/main">
   <p:sldMasterIdLst>
-    <p:sldMasterId xmlns:r="http://schemas.openxmlformats.org/officeDocument/2006/relationships" id="2147483648" r:id="R989ac1f21bd7421e"/>
+    <p:sldMasterId xmlns:r="http://schemas.openxmlformats.org/officeDocument/2006/relationships" id="2147483648" r:id="R44225c16ccf8415c"/>
   </p:sldMasterIdLst>
   <p:notesMasterIdLst>
-    <p:notesMasterId xmlns:r="http://schemas.openxmlformats.org/officeDocument/2006/relationships" r:id="Rc0a10645b5af41e4"/>
+    <p:notesMasterId xmlns:r="http://schemas.openxmlformats.org/officeDocument/2006/relationships" r:id="Re4e69e92bb664d87"/>
   </p:notesMasterIdLst>
   <p:sldIdLst>
-    <p:sldId xmlns:r="http://schemas.openxmlformats.org/officeDocument/2006/relationships" id="256" r:id="R3e17857ae7e0434d"/>
-    <p:sldId xmlns:r="http://schemas.openxmlformats.org/officeDocument/2006/relationships" id="257" r:id="Ra0964fcfcd23423f"/>
-    <p:sldId xmlns:r="http://schemas.openxmlformats.org/officeDocument/2006/relationships" id="258" r:id="R5f58876498164bdf"/>
-    <p:sldId xmlns:r="http://schemas.openxmlformats.org/officeDocument/2006/relationships" id="259" r:id="Ra1f9539b8f27480f"/>
-    <p:sldId xmlns:r="http://schemas.openxmlformats.org/officeDocument/2006/relationships" id="260" r:id="R061d483b0650446d"/>
-    <p:sldId xmlns:r="http://schemas.openxmlformats.org/officeDocument/2006/relationships" id="261" r:id="Ra1cf8dccd7cf42ae"/>
-    <p:sldId xmlns:r="http://schemas.openxmlformats.org/officeDocument/2006/relationships" id="262" r:id="R56cb33b8d182462e"/>
-    <p:sldId xmlns:r="http://schemas.openxmlformats.org/officeDocument/2006/relationships" id="263" r:id="R85b88f87fe0d4137"/>
-    <p:sldId xmlns:r="http://schemas.openxmlformats.org/officeDocument/2006/relationships" id="264" r:id="R2b0eee5e7f1a48a8"/>
-    <p:sldId xmlns:r="http://schemas.openxmlformats.org/officeDocument/2006/relationships" id="265" r:id="R2e1bb4664f854f22"/>
-    <p:sldId xmlns:r="http://schemas.openxmlformats.org/officeDocument/2006/relationships" id="266" r:id="R118868c20a454d6b"/>
-    <p:sldId xmlns:r="http://schemas.openxmlformats.org/officeDocument/2006/relationships" id="267" r:id="R4cafa98483ee43e4"/>
-    <p:sldId xmlns:r="http://schemas.openxmlformats.org/officeDocument/2006/relationships" id="268" r:id="R07e89c744d604cc2"/>
-    <p:sldId xmlns:r="http://schemas.openxmlformats.org/officeDocument/2006/relationships" id="269" r:id="Re479905afbf04764"/>
-    <p:sldId xmlns:r="http://schemas.openxmlformats.org/officeDocument/2006/relationships" id="270" r:id="R477f14addfe64a84"/>
-    <p:sldId xmlns:r="http://schemas.openxmlformats.org/officeDocument/2006/relationships" id="271" r:id="R6984822c49d24e11"/>
-    <p:sldId xmlns:r="http://schemas.openxmlformats.org/officeDocument/2006/relationships" id="272" r:id="R3c18b2c24cc74dde"/>
-    <p:sldId xmlns:r="http://schemas.openxmlformats.org/officeDocument/2006/relationships" id="273" r:id="Rf421c02cd54a4581"/>
-    <p:sldId xmlns:r="http://schemas.openxmlformats.org/officeDocument/2006/relationships" id="274" r:id="R951d7c0639d54ab5"/>
-    <p:sldId xmlns:r="http://schemas.openxmlformats.org/officeDocument/2006/relationships" id="275" r:id="Rb07db697f35946c7"/>
+    <p:sldId xmlns:r="http://schemas.openxmlformats.org/officeDocument/2006/relationships" id="256" r:id="R38b31b015ae0480a"/>
+    <p:sldId xmlns:r="http://schemas.openxmlformats.org/officeDocument/2006/relationships" id="257" r:id="R0fc5d48d6d4b414f"/>
+    <p:sldId xmlns:r="http://schemas.openxmlformats.org/officeDocument/2006/relationships" id="258" r:id="R171e759cf4a949d1"/>
+    <p:sldId xmlns:r="http://schemas.openxmlformats.org/officeDocument/2006/relationships" id="259" r:id="R93f9eaf0d1b7451d"/>
+    <p:sldId xmlns:r="http://schemas.openxmlformats.org/officeDocument/2006/relationships" id="260" r:id="Rf53d4eba7b404b06"/>
+    <p:sldId xmlns:r="http://schemas.openxmlformats.org/officeDocument/2006/relationships" id="261" r:id="Rda8284ef9a0240e0"/>
+    <p:sldId xmlns:r="http://schemas.openxmlformats.org/officeDocument/2006/relationships" id="262" r:id="R4b809c20db7d46ee"/>
+    <p:sldId xmlns:r="http://schemas.openxmlformats.org/officeDocument/2006/relationships" id="263" r:id="Rba5941b683f24586"/>
+    <p:sldId xmlns:r="http://schemas.openxmlformats.org/officeDocument/2006/relationships" id="264" r:id="R3ae43d7d3e3745dd"/>
+    <p:sldId xmlns:r="http://schemas.openxmlformats.org/officeDocument/2006/relationships" id="265" r:id="Rf02b2e7919f24bf2"/>
+    <p:sldId xmlns:r="http://schemas.openxmlformats.org/officeDocument/2006/relationships" id="266" r:id="Rd216d91298ab4c0d"/>
+    <p:sldId xmlns:r="http://schemas.openxmlformats.org/officeDocument/2006/relationships" id="267" r:id="Rcb5f3f8750514795"/>
+    <p:sldId xmlns:r="http://schemas.openxmlformats.org/officeDocument/2006/relationships" id="268" r:id="R0a45b01324644edb"/>
+    <p:sldId xmlns:r="http://schemas.openxmlformats.org/officeDocument/2006/relationships" id="269" r:id="R4b0f37ffd1234e5d"/>
+    <p:sldId xmlns:r="http://schemas.openxmlformats.org/officeDocument/2006/relationships" id="270" r:id="R319f25a4a02f4554"/>
+    <p:sldId xmlns:r="http://schemas.openxmlformats.org/officeDocument/2006/relationships" id="271" r:id="R85f6217274124417"/>
+    <p:sldId xmlns:r="http://schemas.openxmlformats.org/officeDocument/2006/relationships" id="272" r:id="R8aa296e8385f49ab"/>
+    <p:sldId xmlns:r="http://schemas.openxmlformats.org/officeDocument/2006/relationships" id="273" r:id="Rdcae1f11c4344f38"/>
+    <p:sldId xmlns:r="http://schemas.openxmlformats.org/officeDocument/2006/relationships" id="274" r:id="R83571d53ee664e30"/>
+    <p:sldId xmlns:r="http://schemas.openxmlformats.org/officeDocument/2006/relationships" id="275" r:id="R0e02fccedfeb4d95"/>
   </p:sldIdLst>
   <p:sldSz cx="12192000" cy="6858000"/>
   <p:notesSz cx="6858000" cy="9144000"/>
@@ -501,6 +501,26 @@
           </a:p>
           <a:p xmlns:a="http://schemas.openxmlformats.org/drawingml/2006/main">
             <a:r>
+              <a:t>There is one environment change from last week. Our review notebook used DuckDB. Today we need PostgreSQL's own catalog and integrity behavior. Open the first-session walkthrough linked on this week's page. In a Supabase practice project, SQL Editor sends our statements to the hosted PostgreSQL server. If account setup is unavailable, the linked PGlite playground runs PostgreSQL in your browser for this week's work. Choose one path rather than setting up both.</a:t>
+            </a:r>
+          </a:p>
+          <a:p xmlns:a="http://schemas.openxmlformats.org/drawingml/2006/main">
+            <a:r>
+              <a:t/>
+            </a:r>
+          </a:p>
+          <a:p xmlns:a="http://schemas.openxmlformats.org/drawingml/2006/main">
+            <a:r>
+              <a:t>We start by selecting two plus three, labeled sum, alongside current_database. Five in the result tells us a statement ran; it does not mean our course tables already exist. The next step loads the setup file and checks its final counts. That file resets the practice schema, so keep later queries in a separate editor query. We want to add to our work during the course, not recreate the starting state every time we press Run.</a:t>
+            </a:r>
+          </a:p>
+          <a:p xmlns:a="http://schemas.openxmlformats.org/drawingml/2006/main">
+            <a:r>
+              <a:t/>
+            </a:r>
+          </a:p>
+          <a:p xmlns:a="http://schemas.openxmlformats.org/drawingml/2006/main">
+            <a:r>
               <a:t>[Sources]</a:t>
             </a:r>
           </a:p>
@@ -512,6 +532,16 @@
           <a:p xmlns:a="http://schemas.openxmlformats.org/drawingml/2006/main">
             <a:r>
               <a:t>- Course Metro Support setup and Week 3 lab assignments.</a:t>
+            </a:r>
+          </a:p>
+          <a:p xmlns:a="http://schemas.openxmlformats.org/drawingml/2006/main">
+            <a:r>
+              <a:t>- https://supabase.com/docs/guides/database/overview</a:t>
+            </a:r>
+          </a:p>
+          <a:p xmlns:a="http://schemas.openxmlformats.org/drawingml/2006/main">
+            <a:r>
+              <a:t>- https://pglite.dev/docs/about</a:t>
             </a:r>
           </a:p>
         </p:txBody>
@@ -716,7 +746,7 @@
           <a:lstStyle xmlns:a="http://schemas.openxmlformats.org/drawingml/2006/main"/>
           <a:p xmlns:a="http://schemas.openxmlformats.org/drawingml/2006/main">
             <a:r>
-              <a:t>You now have the examples needed for the first lab. Work individually in your personal PostgreSQL or Supabase practice database. The linked setup file resets only the named course schema, but that still means you should not use a project containing work you need to preserve under that schema. Confirm the eight-user, twelve-ticket, twenty-one-event baseline before interpreting results.</a:t>
+              <a:t>You now have the examples needed for the first lab. Work individually in your personal PostgreSQL or Supabase practice database, or use the browser PostgreSQL option in the setup guide. The linked setup file removes the course schema and dependent objects, which can include objects outside that schema. It belongs in a disposable practice environment. Confirm the eight-user, twelve-ticket, twenty-one-event baseline before interpreting results, then move to a separate query so running your answers does not run the reset again.</a:t>
             </a:r>
           </a:p>
           <a:p xmlns:a="http://schemas.openxmlformats.org/drawingml/2006/main">
@@ -2196,6 +2226,16 @@
           </a:p>
           <a:p xmlns:a="http://schemas.openxmlformats.org/drawingml/2006/main">
             <a:r>
+              <a:t>This also explains a common dashboard surprise. Supabase's Table Editor has a schema selector above the table list. If it says public, you may see an empty list even though the setup created all three tables in metro_support. Change the selector to metro_support. We can also query metro_support.tickets directly in SQL Editor without relying on which list the graphical editor currently displays. The setup guide includes a screenshot of that selector.</a:t>
+            </a:r>
+          </a:p>
+          <a:p xmlns:a="http://schemas.openxmlformats.org/drawingml/2006/main">
+            <a:r>
+              <a:t/>
+            </a:r>
+          </a:p>
+          <a:p xmlns:a="http://schemas.openxmlformats.org/drawingml/2006/main">
+            <a:r>
               <a:t>[Sources]</a:t>
             </a:r>
           </a:p>
@@ -2207,6 +2247,11 @@
           <a:p xmlns:a="http://schemas.openxmlformats.org/drawingml/2006/main">
             <a:r>
               <a:t>- https://www.postgresql.org/docs/15/ddl-schemas.html</a:t>
+            </a:r>
+          </a:p>
+          <a:p xmlns:a="http://schemas.openxmlformats.org/drawingml/2006/main">
+            <a:r>
+              <a:t>- https://supabase.com/docs/guides/database/overview</a:t>
             </a:r>
           </a:p>
         </p:txBody>
@@ -2971,7 +3016,7 @@
           </a:p>
           <a:p xmlns:a="http://schemas.openxmlformats.org/drawingml/2006/main">
             <a:r>
-              <a:t>We are using PostgreSQL 15 for the reference test. Its NOT NULL information should also be inspected through the column metadata we just used. Absence from this particular constraint list does not mean every column permits NULL. Catalog representation can differ across PostgreSQL versions, so read the actual definition and use the appropriate metadata surface.</a:t>
+              <a:t>The exact number of catalog rows can differ between PostgreSQL versions. PostgreSQL 18 also lists NOT NULL constraints here with the code n. On PostgreSQL 15, inspect that information through the column metadata we just used. In both versions, is_nullable answers whether a column permits a missing value. Extra n rows do not mean you loaded extra tickets or added extra business rules. They are another way the server describes the same required-value definitions.</a:t>
             </a:r>
           </a:p>
           <a:p xmlns:a="http://schemas.openxmlformats.org/drawingml/2006/main">
@@ -3002,6 +3047,11 @@
           <a:p xmlns:a="http://schemas.openxmlformats.org/drawingml/2006/main">
             <a:r>
               <a:t>- https://www.postgresql.org/docs/15/catalog-pg-constraint.html</a:t>
+            </a:r>
+          </a:p>
+          <a:p xmlns:a="http://schemas.openxmlformats.org/drawingml/2006/main">
+            <a:r>
+              <a:t>- https://www.postgresql.org/docs/18/catalog-pg-constraint.html</a:t>
             </a:r>
           </a:p>
           <a:p xmlns:a="http://schemas.openxmlformats.org/drawingml/2006/main">
@@ -3074,7 +3124,7 @@
   </p:cSld>
   <p:clrMap bg1="lt1" tx1="dk1" bg2="lt2" tx2="dk2" accent1="accent1" accent2="accent2" accent3="accent3" accent4="accent4" accent5="accent5" accent6="accent6" hlink="hlink" folHlink="folHlink"/>
   <p:sldLayoutIdLst>
-    <p:sldLayoutId xmlns:r="http://schemas.openxmlformats.org/officeDocument/2006/relationships" id="2147483649" r:id="R318a53e91ad043b7"/>
+    <p:sldLayoutId xmlns:r="http://schemas.openxmlformats.org/officeDocument/2006/relationships" id="2147483649" r:id="R3f815f58b3f44e33"/>
   </p:sldLayoutIdLst>
   <p:txStyles>
     <p:titleStyle>
@@ -4926,7 +4976,7 @@
           <p:cNvPr id="22" name="">
             <a:extLst xmlns:a="http://schemas.openxmlformats.org/drawingml/2006/main">
               <a:ext uri="{FF2B5EF4-FFF2-40B4-BE49-F238E27FC236}">
-                <a16:creationId xmlns:a16="http://schemas.microsoft.com/office/drawing/2014/main" id="{C621A7E2-84A9-4C1E-A85B-68A910CD6DA0}"/>
+                <a16:creationId xmlns:a16="http://schemas.microsoft.com/office/drawing/2014/main" id="{7573CE64-24B4-4497-8F93-89E96C10EDE5}"/>
               </a:ext>
             </a:extLst>
           </p:cNvPr>
@@ -4958,7 +5008,7 @@
           <p:cNvPr id="23" name="index-query-label">
             <a:extLst xmlns:a="http://schemas.openxmlformats.org/drawingml/2006/main">
               <a:ext uri="{FF2B5EF4-FFF2-40B4-BE49-F238E27FC236}">
-                <a16:creationId xmlns:a16="http://schemas.microsoft.com/office/drawing/2014/main" id="{7191CEA4-161F-4EC1-B192-A8F0F40FE7B8}"/>
+                <a16:creationId xmlns:a16="http://schemas.microsoft.com/office/drawing/2014/main" id="{4DD60CCA-E8A6-4BDA-92BD-82E7648397B1}"/>
               </a:ext>
             </a:extLst>
           </p:cNvPr>
@@ -5015,7 +5065,7 @@
           <p:cNvPr id="24" name="index-query">
             <a:extLst xmlns:a="http://schemas.openxmlformats.org/drawingml/2006/main">
               <a:ext uri="{FF2B5EF4-FFF2-40B4-BE49-F238E27FC236}">
-                <a16:creationId xmlns:a16="http://schemas.microsoft.com/office/drawing/2014/main" id="{5293A416-6F9B-4F9D-A9F0-1F4769D0D896}"/>
+                <a16:creationId xmlns:a16="http://schemas.microsoft.com/office/drawing/2014/main" id="{67A2AA94-CAD4-4772-91E8-CEC38DCE9C1B}"/>
               </a:ext>
             </a:extLst>
           </p:cNvPr>
@@ -7603,7 +7653,7 @@
           <p:cNvPr id="48" name="scope">
             <a:extLst xmlns:a="http://schemas.openxmlformats.org/drawingml/2006/main">
               <a:ext uri="{FF2B5EF4-FFF2-40B4-BE49-F238E27FC236}">
-                <a16:creationId xmlns:a16="http://schemas.microsoft.com/office/drawing/2014/main" id="{59653B27-0C70-4264-A499-68D0BBB0A2AB}"/>
+                <a16:creationId xmlns:a16="http://schemas.microsoft.com/office/drawing/2014/main" id="{F837B310-FCC3-4CD3-843C-01E02AF80C63}"/>
               </a:ext>
             </a:extLst>
           </p:cNvPr>
@@ -9704,7 +9754,7 @@
           <p:cNvPr id="23" name="rejected-label">
             <a:extLst xmlns:a="http://schemas.openxmlformats.org/drawingml/2006/main">
               <a:ext uri="{FF2B5EF4-FFF2-40B4-BE49-F238E27FC236}">
-                <a16:creationId xmlns:a16="http://schemas.microsoft.com/office/drawing/2014/main" id="{723AD72E-D808-44C2-B547-EA37F45AD256}"/>
+                <a16:creationId xmlns:a16="http://schemas.microsoft.com/office/drawing/2014/main" id="{993F442D-F7C4-48B5-A76C-42E000691B13}"/>
               </a:ext>
             </a:extLst>
           </p:cNvPr>
@@ -9761,7 +9811,7 @@
           <p:cNvPr id="24" name="">
             <a:extLst xmlns:a="http://schemas.openxmlformats.org/drawingml/2006/main">
               <a:ext uri="{FF2B5EF4-FFF2-40B4-BE49-F238E27FC236}">
-                <a16:creationId xmlns:a16="http://schemas.microsoft.com/office/drawing/2014/main" id="{D116EA80-2354-4249-8CB8-73D1E547A9E8}"/>
+                <a16:creationId xmlns:a16="http://schemas.microsoft.com/office/drawing/2014/main" id="{87045198-B246-45D4-AA54-2D4E2781CEDC}"/>
               </a:ext>
             </a:extLst>
           </p:cNvPr>
@@ -9793,7 +9843,7 @@
           <p:cNvPr id="25" name="rejected-sql">
             <a:extLst xmlns:a="http://schemas.openxmlformats.org/drawingml/2006/main">
               <a:ext uri="{FF2B5EF4-FFF2-40B4-BE49-F238E27FC236}">
-                <a16:creationId xmlns:a16="http://schemas.microsoft.com/office/drawing/2014/main" id="{BB3060C4-D2A7-4EF7-B691-B7DC2E900DF4}"/>
+                <a16:creationId xmlns:a16="http://schemas.microsoft.com/office/drawing/2014/main" id="{3B763740-7499-4119-9796-661ACD884890}"/>
               </a:ext>
             </a:extLst>
           </p:cNvPr>
@@ -9896,7 +9946,7 @@
           <p:cNvPr id="26" name="valid-label">
             <a:extLst xmlns:a="http://schemas.openxmlformats.org/drawingml/2006/main">
               <a:ext uri="{FF2B5EF4-FFF2-40B4-BE49-F238E27FC236}">
-                <a16:creationId xmlns:a16="http://schemas.microsoft.com/office/drawing/2014/main" id="{43B2157D-8392-48AD-A31C-96412984B911}"/>
+                <a16:creationId xmlns:a16="http://schemas.microsoft.com/office/drawing/2014/main" id="{995AECC3-3464-46B5-A63F-06062AAE093B}"/>
               </a:ext>
             </a:extLst>
           </p:cNvPr>
@@ -9953,7 +10003,7 @@
           <p:cNvPr id="27" name="">
             <a:extLst xmlns:a="http://schemas.openxmlformats.org/drawingml/2006/main">
               <a:ext uri="{FF2B5EF4-FFF2-40B4-BE49-F238E27FC236}">
-                <a16:creationId xmlns:a16="http://schemas.microsoft.com/office/drawing/2014/main" id="{E1B9A0E9-F944-4558-B2FD-99EB9E4A0481}"/>
+                <a16:creationId xmlns:a16="http://schemas.microsoft.com/office/drawing/2014/main" id="{66C48D6B-9D5E-486B-BD9F-111D5BA8FA04}"/>
               </a:ext>
             </a:extLst>
           </p:cNvPr>
@@ -9985,7 +10035,7 @@
           <p:cNvPr id="28" name="valid-sql">
             <a:extLst xmlns:a="http://schemas.openxmlformats.org/drawingml/2006/main">
               <a:ext uri="{FF2B5EF4-FFF2-40B4-BE49-F238E27FC236}">
-                <a16:creationId xmlns:a16="http://schemas.microsoft.com/office/drawing/2014/main" id="{AEAC9EC4-CC9D-4EB2-B270-EDDA22760444}"/>
+                <a16:creationId xmlns:a16="http://schemas.microsoft.com/office/drawing/2014/main" id="{04B814A9-2D85-4FAB-A4DD-79421174DAD8}"/>
               </a:ext>
             </a:extLst>
           </p:cNvPr>
@@ -10180,7 +10230,7 @@
           <p:cNvPr id="29" name="failure-result">
             <a:extLst xmlns:a="http://schemas.openxmlformats.org/drawingml/2006/main">
               <a:ext uri="{FF2B5EF4-FFF2-40B4-BE49-F238E27FC236}">
-                <a16:creationId xmlns:a16="http://schemas.microsoft.com/office/drawing/2014/main" id="{FAB70D05-CBF2-4343-8A8C-155C77258CC2}"/>
+                <a16:creationId xmlns:a16="http://schemas.microsoft.com/office/drawing/2014/main" id="{12721B08-6A07-4347-8C40-7C2AB0C2DDA0}"/>
               </a:ext>
             </a:extLst>
           </p:cNvPr>
@@ -10283,7 +10333,7 @@
           <p:cNvPr id="30" name="success-result">
             <a:extLst xmlns:a="http://schemas.openxmlformats.org/drawingml/2006/main">
               <a:ext uri="{FF2B5EF4-FFF2-40B4-BE49-F238E27FC236}">
-                <a16:creationId xmlns:a16="http://schemas.microsoft.com/office/drawing/2014/main" id="{1D5EABF2-15B3-47C4-9567-6FAAD562963A}"/>
+                <a16:creationId xmlns:a16="http://schemas.microsoft.com/office/drawing/2014/main" id="{764DE785-EE44-4AA5-9F56-DAE27241EB21}"/>
               </a:ext>
             </a:extLst>
           </p:cNvPr>
@@ -10420,7 +10470,7 @@
           <p:cNvPr id="8" name="eyebrow">
             <a:extLst xmlns:a="http://schemas.openxmlformats.org/drawingml/2006/main">
               <a:ext uri="{FF2B5EF4-FFF2-40B4-BE49-F238E27FC236}">
-                <a16:creationId xmlns:a16="http://schemas.microsoft.com/office/drawing/2014/main" id="{F481370B-C28C-4834-809D-F94CCED5F3AB}"/>
+                <a16:creationId xmlns:a16="http://schemas.microsoft.com/office/drawing/2014/main" id="{1BB249CF-E6B4-4026-A781-F3E0482FB09E}"/>
               </a:ext>
             </a:extLst>
           </p:cNvPr>
@@ -10477,7 +10527,7 @@
           <p:cNvPr id="2" name="slide-title">
             <a:extLst xmlns:a="http://schemas.openxmlformats.org/drawingml/2006/main">
               <a:ext uri="{FF2B5EF4-FFF2-40B4-BE49-F238E27FC236}">
-                <a16:creationId xmlns:a16="http://schemas.microsoft.com/office/drawing/2014/main" id="{F7C3F699-0739-4C29-9EA2-E3D83EFD62A1}"/>
+                <a16:creationId xmlns:a16="http://schemas.microsoft.com/office/drawing/2014/main" id="{0734FED5-A267-4187-B0E7-56BACC6F4FA8}"/>
               </a:ext>
             </a:extLst>
           </p:cNvPr>
@@ -10534,7 +10584,7 @@
           <p:cNvPr id="3" name="">
             <a:extLst xmlns:a="http://schemas.openxmlformats.org/drawingml/2006/main">
               <a:ext uri="{FF2B5EF4-FFF2-40B4-BE49-F238E27FC236}">
-                <a16:creationId xmlns:a16="http://schemas.microsoft.com/office/drawing/2014/main" id="{D14F6C49-FD59-454C-8B3F-C5A58D63108C}"/>
+                <a16:creationId xmlns:a16="http://schemas.microsoft.com/office/drawing/2014/main" id="{B4D5833F-859E-40FF-883E-C240598EB5C0}"/>
               </a:ext>
             </a:extLst>
           </p:cNvPr>
@@ -10566,7 +10616,7 @@
           <p:cNvPr id="4" name="slide-number">
             <a:extLst xmlns:a="http://schemas.openxmlformats.org/drawingml/2006/main">
               <a:ext uri="{FF2B5EF4-FFF2-40B4-BE49-F238E27FC236}">
-                <a16:creationId xmlns:a16="http://schemas.microsoft.com/office/drawing/2014/main" id="{5E39E9B7-6C83-407F-BDDA-F0AE08140C00}"/>
+                <a16:creationId xmlns:a16="http://schemas.microsoft.com/office/drawing/2014/main" id="{4EFC73E6-724A-4F55-9E41-EB5F2DF59829}"/>
               </a:ext>
             </a:extLst>
           </p:cNvPr>
@@ -10942,7 +10992,7 @@
           <p:cNvPr id="6" name="null-rule">
             <a:extLst xmlns:a="http://schemas.openxmlformats.org/drawingml/2006/main">
               <a:ext uri="{FF2B5EF4-FFF2-40B4-BE49-F238E27FC236}">
-                <a16:creationId xmlns:a16="http://schemas.microsoft.com/office/drawing/2014/main" id="{45EE1FC4-CA1C-44CA-85A2-F341CCC12D7F}"/>
+                <a16:creationId xmlns:a16="http://schemas.microsoft.com/office/drawing/2014/main" id="{8F00B1F1-C16C-4CA2-9D8C-86DB569D4FD1}"/>
               </a:ext>
             </a:extLst>
           </p:cNvPr>
@@ -10999,7 +11049,7 @@
           <p:cNvPr id="7" name="where-contrast">
             <a:extLst xmlns:a="http://schemas.openxmlformats.org/drawingml/2006/main">
               <a:ext uri="{FF2B5EF4-FFF2-40B4-BE49-F238E27FC236}">
-                <a16:creationId xmlns:a16="http://schemas.microsoft.com/office/drawing/2014/main" id="{88F526C9-722F-4593-ACA0-A88CE3A44213}"/>
+                <a16:creationId xmlns:a16="http://schemas.microsoft.com/office/drawing/2014/main" id="{F8B3281C-E341-4DF1-9B98-8E94E8462857}"/>
               </a:ext>
             </a:extLst>
           </p:cNvPr>
@@ -11782,7 +11832,7 @@
           <p:cNvPr id="10" name="eyebrow">
             <a:extLst xmlns:a="http://schemas.openxmlformats.org/drawingml/2006/main">
               <a:ext uri="{FF2B5EF4-FFF2-40B4-BE49-F238E27FC236}">
-                <a16:creationId xmlns:a16="http://schemas.microsoft.com/office/drawing/2014/main" id="{894D5D17-070B-4E04-8D27-8E4EF3BCFFD6}"/>
+                <a16:creationId xmlns:a16="http://schemas.microsoft.com/office/drawing/2014/main" id="{3490D045-D508-4BBA-8106-C30120A85F71}"/>
               </a:ext>
             </a:extLst>
           </p:cNvPr>
@@ -11839,7 +11889,7 @@
           <p:cNvPr id="2" name="slide-title">
             <a:extLst xmlns:a="http://schemas.openxmlformats.org/drawingml/2006/main">
               <a:ext uri="{FF2B5EF4-FFF2-40B4-BE49-F238E27FC236}">
-                <a16:creationId xmlns:a16="http://schemas.microsoft.com/office/drawing/2014/main" id="{359F7B60-E64B-480D-BA0D-D349248749DE}"/>
+                <a16:creationId xmlns:a16="http://schemas.microsoft.com/office/drawing/2014/main" id="{5EF95A77-5075-4531-A1B3-AA980C346006}"/>
               </a:ext>
             </a:extLst>
           </p:cNvPr>
@@ -11896,7 +11946,7 @@
           <p:cNvPr id="3" name="">
             <a:extLst xmlns:a="http://schemas.openxmlformats.org/drawingml/2006/main">
               <a:ext uri="{FF2B5EF4-FFF2-40B4-BE49-F238E27FC236}">
-                <a16:creationId xmlns:a16="http://schemas.microsoft.com/office/drawing/2014/main" id="{F3346F3A-3361-414C-98D0-DA7D2A09D117}"/>
+                <a16:creationId xmlns:a16="http://schemas.microsoft.com/office/drawing/2014/main" id="{7C26B6DC-59E9-4CC4-8F27-658734739003}"/>
               </a:ext>
             </a:extLst>
           </p:cNvPr>
@@ -11928,7 +11978,7 @@
           <p:cNvPr id="4" name="slide-number">
             <a:extLst xmlns:a="http://schemas.openxmlformats.org/drawingml/2006/main">
               <a:ext uri="{FF2B5EF4-FFF2-40B4-BE49-F238E27FC236}">
-                <a16:creationId xmlns:a16="http://schemas.microsoft.com/office/drawing/2014/main" id="{2D63836D-B3F6-4961-A66B-B6D1B0A91B1E}"/>
+                <a16:creationId xmlns:a16="http://schemas.microsoft.com/office/drawing/2014/main" id="{E52EB1C4-92B4-4171-949F-311401647BF3}"/>
               </a:ext>
             </a:extLst>
           </p:cNvPr>
@@ -11985,7 +12035,7 @@
           <p:cNvPr id="5" name="">
             <a:extLst xmlns:a="http://schemas.openxmlformats.org/drawingml/2006/main">
               <a:ext uri="{FF2B5EF4-FFF2-40B4-BE49-F238E27FC236}">
-                <a16:creationId xmlns:a16="http://schemas.microsoft.com/office/drawing/2014/main" id="{31E9DC71-EA41-4975-A4C6-FB7992944504}"/>
+                <a16:creationId xmlns:a16="http://schemas.microsoft.com/office/drawing/2014/main" id="{5FB7705A-224C-4A52-B68B-E917E9E0BB8E}"/>
               </a:ext>
             </a:extLst>
           </p:cNvPr>
@@ -12017,7 +12067,7 @@
           <p:cNvPr id="6" name="subset-sql">
             <a:extLst xmlns:a="http://schemas.openxmlformats.org/drawingml/2006/main">
               <a:ext uri="{FF2B5EF4-FFF2-40B4-BE49-F238E27FC236}">
-                <a16:creationId xmlns:a16="http://schemas.microsoft.com/office/drawing/2014/main" id="{6AA0D205-3283-4270-A022-73EBCABC5077}"/>
+                <a16:creationId xmlns:a16="http://schemas.microsoft.com/office/drawing/2014/main" id="{67A988A5-FC59-4B69-A173-641814E8BBAD}"/>
               </a:ext>
             </a:extLst>
           </p:cNvPr>
@@ -12702,7 +12752,7 @@
           <p:cNvPr id="8" name="filter-explanation">
             <a:extLst xmlns:a="http://schemas.openxmlformats.org/drawingml/2006/main">
               <a:ext uri="{FF2B5EF4-FFF2-40B4-BE49-F238E27FC236}">
-                <a16:creationId xmlns:a16="http://schemas.microsoft.com/office/drawing/2014/main" id="{677F56AA-2E25-419D-9E97-E920E34EA45F}"/>
+                <a16:creationId xmlns:a16="http://schemas.microsoft.com/office/drawing/2014/main" id="{2AE3EABE-3F88-44F9-963D-CA8AAC8B09F2}"/>
               </a:ext>
             </a:extLst>
           </p:cNvPr>
@@ -12759,7 +12809,7 @@
           <p:cNvPr id="9" name="subset-check">
             <a:extLst xmlns:a="http://schemas.openxmlformats.org/drawingml/2006/main">
               <a:ext uri="{FF2B5EF4-FFF2-40B4-BE49-F238E27FC236}">
-                <a16:creationId xmlns:a16="http://schemas.microsoft.com/office/drawing/2014/main" id="{63964E0E-EE9A-4333-AAEE-CAD28DD65FD4}"/>
+                <a16:creationId xmlns:a16="http://schemas.microsoft.com/office/drawing/2014/main" id="{1B2DCD59-C700-4C09-A9E0-E7131FC8AD8C}"/>
               </a:ext>
             </a:extLst>
           </p:cNvPr>
@@ -13393,7 +13443,7 @@
           <p:cNvPr id="10" name="eyebrow">
             <a:extLst xmlns:a="http://schemas.openxmlformats.org/drawingml/2006/main">
               <a:ext uri="{FF2B5EF4-FFF2-40B4-BE49-F238E27FC236}">
-                <a16:creationId xmlns:a16="http://schemas.microsoft.com/office/drawing/2014/main" id="{4D46E67C-10BA-426D-BD04-4F586403351C}"/>
+                <a16:creationId xmlns:a16="http://schemas.microsoft.com/office/drawing/2014/main" id="{5B50E433-5B23-4309-82F6-09F2DC2EFA4B}"/>
               </a:ext>
             </a:extLst>
           </p:cNvPr>
@@ -13450,7 +13500,7 @@
           <p:cNvPr id="2" name="slide-title">
             <a:extLst xmlns:a="http://schemas.openxmlformats.org/drawingml/2006/main">
               <a:ext uri="{FF2B5EF4-FFF2-40B4-BE49-F238E27FC236}">
-                <a16:creationId xmlns:a16="http://schemas.microsoft.com/office/drawing/2014/main" id="{C2367C16-FB95-4958-91FE-FDF6CAD5811F}"/>
+                <a16:creationId xmlns:a16="http://schemas.microsoft.com/office/drawing/2014/main" id="{61122413-E62F-4143-93C1-BA9958DA3C0E}"/>
               </a:ext>
             </a:extLst>
           </p:cNvPr>
@@ -13507,7 +13557,7 @@
           <p:cNvPr id="3" name="">
             <a:extLst xmlns:a="http://schemas.openxmlformats.org/drawingml/2006/main">
               <a:ext uri="{FF2B5EF4-FFF2-40B4-BE49-F238E27FC236}">
-                <a16:creationId xmlns:a16="http://schemas.microsoft.com/office/drawing/2014/main" id="{71265B8A-22D2-474F-891B-80954D8B4936}"/>
+                <a16:creationId xmlns:a16="http://schemas.microsoft.com/office/drawing/2014/main" id="{9DE2EC50-04B0-41FD-9F48-F0AA7A4DA4FF}"/>
               </a:ext>
             </a:extLst>
           </p:cNvPr>
@@ -13539,7 +13589,7 @@
           <p:cNvPr id="4" name="slide-number">
             <a:extLst xmlns:a="http://schemas.openxmlformats.org/drawingml/2006/main">
               <a:ext uri="{FF2B5EF4-FFF2-40B4-BE49-F238E27FC236}">
-                <a16:creationId xmlns:a16="http://schemas.microsoft.com/office/drawing/2014/main" id="{ECBFD28D-C81D-4E00-B102-79B16C73D069}"/>
+                <a16:creationId xmlns:a16="http://schemas.microsoft.com/office/drawing/2014/main" id="{80FE3E01-DFA4-4A7A-B527-73C706A2FB14}"/>
               </a:ext>
             </a:extLst>
           </p:cNvPr>
@@ -13841,7 +13891,7 @@
           <p:cNvPr id="6" name="">
             <a:extLst xmlns:a="http://schemas.openxmlformats.org/drawingml/2006/main">
               <a:ext uri="{FF2B5EF4-FFF2-40B4-BE49-F238E27FC236}">
-                <a16:creationId xmlns:a16="http://schemas.microsoft.com/office/drawing/2014/main" id="{5F9A8173-0359-408C-AB68-8614FFA82DD2}"/>
+                <a16:creationId xmlns:a16="http://schemas.microsoft.com/office/drawing/2014/main" id="{C9FD8C72-5CA4-406A-B5F8-2779650AD207}"/>
               </a:ext>
             </a:extLst>
           </p:cNvPr>
@@ -13873,7 +13923,7 @@
           <p:cNvPr id="7" name="qualified-query">
             <a:extLst xmlns:a="http://schemas.openxmlformats.org/drawingml/2006/main">
               <a:ext uri="{FF2B5EF4-FFF2-40B4-BE49-F238E27FC236}">
-                <a16:creationId xmlns:a16="http://schemas.microsoft.com/office/drawing/2014/main" id="{F111B9F4-22A1-4558-9BFE-5B41618D7F4B}"/>
+                <a16:creationId xmlns:a16="http://schemas.microsoft.com/office/drawing/2014/main" id="{917BAD7A-68BF-4B6F-A34F-5C0511CE84EB}"/>
               </a:ext>
             </a:extLst>
           </p:cNvPr>
@@ -13953,7 +14003,7 @@
           <p:cNvPr id="8" name="qualification">
             <a:extLst xmlns:a="http://schemas.openxmlformats.org/drawingml/2006/main">
               <a:ext uri="{FF2B5EF4-FFF2-40B4-BE49-F238E27FC236}">
-                <a16:creationId xmlns:a16="http://schemas.microsoft.com/office/drawing/2014/main" id="{C6459427-EE3D-49A8-8025-DBD395A5DF02}"/>
+                <a16:creationId xmlns:a16="http://schemas.microsoft.com/office/drawing/2014/main" id="{49FA365C-2B1C-4249-9398-D58C73B68A19}"/>
               </a:ext>
             </a:extLst>
           </p:cNvPr>
@@ -14033,7 +14083,7 @@
           <p:cNvPr id="9" name="schema-context">
             <a:extLst xmlns:a="http://schemas.openxmlformats.org/drawingml/2006/main">
               <a:ext uri="{FF2B5EF4-FFF2-40B4-BE49-F238E27FC236}">
-                <a16:creationId xmlns:a16="http://schemas.microsoft.com/office/drawing/2014/main" id="{C3436882-DEB4-4C93-BCFA-EB03470D533E}"/>
+                <a16:creationId xmlns:a16="http://schemas.microsoft.com/office/drawing/2014/main" id="{2F78455A-E5DB-4CA5-A11E-B62AC7E1ED4F}"/>
               </a:ext>
             </a:extLst>
           </p:cNvPr>
@@ -14119,7 +14169,7 @@
           <p:cNvPr id="11" name="eyebrow">
             <a:extLst xmlns:a="http://schemas.openxmlformats.org/drawingml/2006/main">
               <a:ext uri="{FF2B5EF4-FFF2-40B4-BE49-F238E27FC236}">
-                <a16:creationId xmlns:a16="http://schemas.microsoft.com/office/drawing/2014/main" id="{7A540EEA-DE3D-45E5-97E4-9C05B7B996EF}"/>
+                <a16:creationId xmlns:a16="http://schemas.microsoft.com/office/drawing/2014/main" id="{823FD0DD-370B-4ADE-AC7D-1309092DF622}"/>
               </a:ext>
             </a:extLst>
           </p:cNvPr>
@@ -14176,7 +14226,7 @@
           <p:cNvPr id="2" name="slide-title">
             <a:extLst xmlns:a="http://schemas.openxmlformats.org/drawingml/2006/main">
               <a:ext uri="{FF2B5EF4-FFF2-40B4-BE49-F238E27FC236}">
-                <a16:creationId xmlns:a16="http://schemas.microsoft.com/office/drawing/2014/main" id="{1EFE3820-8FF7-4617-ADD4-76B6893004B3}"/>
+                <a16:creationId xmlns:a16="http://schemas.microsoft.com/office/drawing/2014/main" id="{173226E8-92DE-4FAA-9D44-D995A7F71B89}"/>
               </a:ext>
             </a:extLst>
           </p:cNvPr>
@@ -14233,7 +14283,7 @@
           <p:cNvPr id="3" name="">
             <a:extLst xmlns:a="http://schemas.openxmlformats.org/drawingml/2006/main">
               <a:ext uri="{FF2B5EF4-FFF2-40B4-BE49-F238E27FC236}">
-                <a16:creationId xmlns:a16="http://schemas.microsoft.com/office/drawing/2014/main" id="{5585D836-92F0-4292-9BB8-F8AD46B64C3D}"/>
+                <a16:creationId xmlns:a16="http://schemas.microsoft.com/office/drawing/2014/main" id="{F492B22E-94FE-4EBD-A51C-EB4058F86DC7}"/>
               </a:ext>
             </a:extLst>
           </p:cNvPr>
@@ -14265,7 +14315,7 @@
           <p:cNvPr id="4" name="slide-number">
             <a:extLst xmlns:a="http://schemas.openxmlformats.org/drawingml/2006/main">
               <a:ext uri="{FF2B5EF4-FFF2-40B4-BE49-F238E27FC236}">
-                <a16:creationId xmlns:a16="http://schemas.microsoft.com/office/drawing/2014/main" id="{8ECD4078-547C-419D-A50E-B20890A561C3}"/>
+                <a16:creationId xmlns:a16="http://schemas.microsoft.com/office/drawing/2014/main" id="{50A84D1E-9D8B-4CB4-AC6A-E446A92327CC}"/>
               </a:ext>
             </a:extLst>
           </p:cNvPr>
@@ -14322,7 +14372,7 @@
           <p:cNvPr id="5" name="hypothesis">
             <a:extLst xmlns:a="http://schemas.openxmlformats.org/drawingml/2006/main">
               <a:ext uri="{FF2B5EF4-FFF2-40B4-BE49-F238E27FC236}">
-                <a16:creationId xmlns:a16="http://schemas.microsoft.com/office/drawing/2014/main" id="{6627DA92-8FE6-446F-AD64-F4C6FFA9C7F0}"/>
+                <a16:creationId xmlns:a16="http://schemas.microsoft.com/office/drawing/2014/main" id="{356280A6-65F8-4A5E-B7D7-B3C0E492F624}"/>
               </a:ext>
             </a:extLst>
           </p:cNvPr>
@@ -14820,7 +14870,7 @@
           <p:cNvPr id="8" name="single-home">
             <a:extLst xmlns:a="http://schemas.openxmlformats.org/drawingml/2006/main">
               <a:ext uri="{FF2B5EF4-FFF2-40B4-BE49-F238E27FC236}">
-                <a16:creationId xmlns:a16="http://schemas.microsoft.com/office/drawing/2014/main" id="{BFE3EA3B-91E7-4068-A347-EF59E14130AF}"/>
+                <a16:creationId xmlns:a16="http://schemas.microsoft.com/office/drawing/2014/main" id="{0CA8CE9C-2C76-4021-A49A-382D33D7EBAE}"/>
               </a:ext>
             </a:extLst>
           </p:cNvPr>
@@ -14877,7 +14927,7 @@
           <p:cNvPr id="9" name="dependency">
             <a:extLst xmlns:a="http://schemas.openxmlformats.org/drawingml/2006/main">
               <a:ext uri="{FF2B5EF4-FFF2-40B4-BE49-F238E27FC236}">
-                <a16:creationId xmlns:a16="http://schemas.microsoft.com/office/drawing/2014/main" id="{CD2A9442-4600-4B49-8108-63E3886F06B4}"/>
+                <a16:creationId xmlns:a16="http://schemas.microsoft.com/office/drawing/2014/main" id="{5CFBC95B-2237-4A29-B61A-31C32034EDAD}"/>
               </a:ext>
             </a:extLst>
           </p:cNvPr>
@@ -14934,7 +14984,7 @@
           <p:cNvPr id="10" name="meaning">
             <a:extLst xmlns:a="http://schemas.openxmlformats.org/drawingml/2006/main">
               <a:ext uri="{FF2B5EF4-FFF2-40B4-BE49-F238E27FC236}">
-                <a16:creationId xmlns:a16="http://schemas.microsoft.com/office/drawing/2014/main" id="{5DE6880A-B7E3-4204-9654-7AB3FDC9CB90}"/>
+                <a16:creationId xmlns:a16="http://schemas.microsoft.com/office/drawing/2014/main" id="{D19350E3-E2B2-45B0-A7BB-88F87D5E37E8}"/>
               </a:ext>
             </a:extLst>
           </p:cNvPr>
@@ -15020,7 +15070,7 @@
           <p:cNvPr id="7" name="eyebrow">
             <a:extLst xmlns:a="http://schemas.openxmlformats.org/drawingml/2006/main">
               <a:ext uri="{FF2B5EF4-FFF2-40B4-BE49-F238E27FC236}">
-                <a16:creationId xmlns:a16="http://schemas.microsoft.com/office/drawing/2014/main" id="{9C01981C-DBFC-4A7B-A05A-8556AC79321D}"/>
+                <a16:creationId xmlns:a16="http://schemas.microsoft.com/office/drawing/2014/main" id="{90218F89-38DA-4B80-B1E9-F56A5569DFD1}"/>
               </a:ext>
             </a:extLst>
           </p:cNvPr>
@@ -15077,7 +15127,7 @@
           <p:cNvPr id="2" name="slide-title">
             <a:extLst xmlns:a="http://schemas.openxmlformats.org/drawingml/2006/main">
               <a:ext uri="{FF2B5EF4-FFF2-40B4-BE49-F238E27FC236}">
-                <a16:creationId xmlns:a16="http://schemas.microsoft.com/office/drawing/2014/main" id="{E1377AB8-3290-48EC-B786-AA794CEB407C}"/>
+                <a16:creationId xmlns:a16="http://schemas.microsoft.com/office/drawing/2014/main" id="{250C61BE-23C3-42E6-99AF-E401434EB9B6}"/>
               </a:ext>
             </a:extLst>
           </p:cNvPr>
@@ -15134,7 +15184,7 @@
           <p:cNvPr id="3" name="">
             <a:extLst xmlns:a="http://schemas.openxmlformats.org/drawingml/2006/main">
               <a:ext uri="{FF2B5EF4-FFF2-40B4-BE49-F238E27FC236}">
-                <a16:creationId xmlns:a16="http://schemas.microsoft.com/office/drawing/2014/main" id="{5211CC27-EB6D-4A7D-93A3-B5EDDFAFF124}"/>
+                <a16:creationId xmlns:a16="http://schemas.microsoft.com/office/drawing/2014/main" id="{B33BDC45-8B75-448E-A4E7-AE04B780E602}"/>
               </a:ext>
             </a:extLst>
           </p:cNvPr>
@@ -15166,7 +15216,7 @@
           <p:cNvPr id="4" name="slide-number">
             <a:extLst xmlns:a="http://schemas.openxmlformats.org/drawingml/2006/main">
               <a:ext uri="{FF2B5EF4-FFF2-40B4-BE49-F238E27FC236}">
-                <a16:creationId xmlns:a16="http://schemas.microsoft.com/office/drawing/2014/main" id="{548D69EC-91ED-4EB0-AF69-A16438283D62}"/>
+                <a16:creationId xmlns:a16="http://schemas.microsoft.com/office/drawing/2014/main" id="{3F9CFC4B-1BE0-41E2-BBA0-A650A17CBBB0}"/>
               </a:ext>
             </a:extLst>
           </p:cNvPr>
@@ -15690,7 +15740,7 @@
           <p:cNvPr id="6" name="type-limit">
             <a:extLst xmlns:a="http://schemas.openxmlformats.org/drawingml/2006/main">
               <a:ext uri="{FF2B5EF4-FFF2-40B4-BE49-F238E27FC236}">
-                <a16:creationId xmlns:a16="http://schemas.microsoft.com/office/drawing/2014/main" id="{788621EC-5287-40C0-9046-3331284C506B}"/>
+                <a16:creationId xmlns:a16="http://schemas.microsoft.com/office/drawing/2014/main" id="{8D34C264-ACC0-45FD-AFDD-D668EFAAA23D}"/>
               </a:ext>
             </a:extLst>
           </p:cNvPr>
@@ -18896,7 +18946,7 @@
           <p:cNvPr id="9" name="eyebrow">
             <a:extLst xmlns:a="http://schemas.openxmlformats.org/drawingml/2006/main">
               <a:ext uri="{FF2B5EF4-FFF2-40B4-BE49-F238E27FC236}">
-                <a16:creationId xmlns:a16="http://schemas.microsoft.com/office/drawing/2014/main" id="{656D8990-1D95-4F60-B945-9625BB4D170A}"/>
+                <a16:creationId xmlns:a16="http://schemas.microsoft.com/office/drawing/2014/main" id="{949402C4-73BC-4475-B338-D7BFFD802D24}"/>
               </a:ext>
             </a:extLst>
           </p:cNvPr>
@@ -18953,7 +19003,7 @@
           <p:cNvPr id="2" name="slide-title">
             <a:extLst xmlns:a="http://schemas.openxmlformats.org/drawingml/2006/main">
               <a:ext uri="{FF2B5EF4-FFF2-40B4-BE49-F238E27FC236}">
-                <a16:creationId xmlns:a16="http://schemas.microsoft.com/office/drawing/2014/main" id="{DA1A091D-73B1-4AE7-BDCF-51DE22FE7AD1}"/>
+                <a16:creationId xmlns:a16="http://schemas.microsoft.com/office/drawing/2014/main" id="{D7E5F18D-3BD8-48A8-B7AC-BF57DAD89DA6}"/>
               </a:ext>
             </a:extLst>
           </p:cNvPr>
@@ -19010,7 +19060,7 @@
           <p:cNvPr id="3" name="">
             <a:extLst xmlns:a="http://schemas.openxmlformats.org/drawingml/2006/main">
               <a:ext uri="{FF2B5EF4-FFF2-40B4-BE49-F238E27FC236}">
-                <a16:creationId xmlns:a16="http://schemas.microsoft.com/office/drawing/2014/main" id="{31F7E159-1E18-406C-8396-265C65078EC9}"/>
+                <a16:creationId xmlns:a16="http://schemas.microsoft.com/office/drawing/2014/main" id="{FC51F5D6-F48A-4DB3-921B-2CF0B5D51F7E}"/>
               </a:ext>
             </a:extLst>
           </p:cNvPr>
@@ -19042,7 +19092,7 @@
           <p:cNvPr id="4" name="slide-number">
             <a:extLst xmlns:a="http://schemas.openxmlformats.org/drawingml/2006/main">
               <a:ext uri="{FF2B5EF4-FFF2-40B4-BE49-F238E27FC236}">
-                <a16:creationId xmlns:a16="http://schemas.microsoft.com/office/drawing/2014/main" id="{D3C7348B-0E77-49FC-83AD-F5507C5F02CF}"/>
+                <a16:creationId xmlns:a16="http://schemas.microsoft.com/office/drawing/2014/main" id="{9E35DE61-2603-4F22-BFC5-48F37DB8BFA8}"/>
               </a:ext>
             </a:extLst>
           </p:cNvPr>
@@ -19099,7 +19149,7 @@
           <p:cNvPr id="5" name="">
             <a:extLst xmlns:a="http://schemas.openxmlformats.org/drawingml/2006/main">
               <a:ext uri="{FF2B5EF4-FFF2-40B4-BE49-F238E27FC236}">
-                <a16:creationId xmlns:a16="http://schemas.microsoft.com/office/drawing/2014/main" id="{63ED80AD-74DC-4D23-9C63-0BE0A4C6E4DD}"/>
+                <a16:creationId xmlns:a16="http://schemas.microsoft.com/office/drawing/2014/main" id="{5691C5AD-A3C2-4678-BACB-6B93D190773C}"/>
               </a:ext>
             </a:extLst>
           </p:cNvPr>
@@ -19131,7 +19181,7 @@
           <p:cNvPr id="6" name="constraint-query">
             <a:extLst xmlns:a="http://schemas.openxmlformats.org/drawingml/2006/main">
               <a:ext uri="{FF2B5EF4-FFF2-40B4-BE49-F238E27FC236}">
-                <a16:creationId xmlns:a16="http://schemas.microsoft.com/office/drawing/2014/main" id="{7DF31327-3251-4E60-870C-AE87B5434536}"/>
+                <a16:creationId xmlns:a16="http://schemas.microsoft.com/office/drawing/2014/main" id="{01B07938-7200-41A6-A630-083EED2196D7}"/>
               </a:ext>
             </a:extLst>
           </p:cNvPr>
@@ -19622,7 +19672,7 @@
           <p:cNvPr id="8" name="catalog-limit">
             <a:extLst xmlns:a="http://schemas.openxmlformats.org/drawingml/2006/main">
               <a:ext uri="{FF2B5EF4-FFF2-40B4-BE49-F238E27FC236}">
-                <a16:creationId xmlns:a16="http://schemas.microsoft.com/office/drawing/2014/main" id="{3D66277E-D39F-4448-9C46-9BF29EACB065}"/>
+                <a16:creationId xmlns:a16="http://schemas.microsoft.com/office/drawing/2014/main" id="{3FBC2CA1-CAA2-4493-8E2A-1C2ED0B635D8}"/>
               </a:ext>
             </a:extLst>
           </p:cNvPr>
@@ -19669,7 +19719,7 @@
                 <a:ea typeface="Helvetica Neue"/>
                 <a:cs typeface="Helvetica Neue"/>
               </a:rPr>
-              <a:t>On PostgreSQL 15, inspect is_nullable separately for NOT NULL. ::regclass identifies the named table.</a:t>
+              <a:t>PostgreSQL 18 also lists n = NOT NULL. In every version, inspect is_nullable in column metadata.</a:t>
             </a:r>
           </a:p>
         </p:txBody>
